--- a/src/main/resources/static/image/default/soldier weapon.pptx
+++ b/src/main/resources/static/image/default/soldier weapon.pptx
@@ -258,7 +258,7 @@
           <a:p>
             <a:fld id="{0E085FA6-3BB9-47BA-8D81-299A75D1B58A}" type="datetimeFigureOut">
               <a:rPr kumimoji="1" lang="ja-JP" altLang="en-US" smtClean="0"/>
-              <a:t>2025/10/16</a:t>
+              <a:t>2026/3/5</a:t>
             </a:fld>
             <a:endParaRPr kumimoji="1" lang="ja-JP" altLang="en-US"/>
           </a:p>
@@ -458,7 +458,7 @@
           <a:p>
             <a:fld id="{0E085FA6-3BB9-47BA-8D81-299A75D1B58A}" type="datetimeFigureOut">
               <a:rPr kumimoji="1" lang="ja-JP" altLang="en-US" smtClean="0"/>
-              <a:t>2025/10/16</a:t>
+              <a:t>2026/3/5</a:t>
             </a:fld>
             <a:endParaRPr kumimoji="1" lang="ja-JP" altLang="en-US"/>
           </a:p>
@@ -668,7 +668,7 @@
           <a:p>
             <a:fld id="{0E085FA6-3BB9-47BA-8D81-299A75D1B58A}" type="datetimeFigureOut">
               <a:rPr kumimoji="1" lang="ja-JP" altLang="en-US" smtClean="0"/>
-              <a:t>2025/10/16</a:t>
+              <a:t>2026/3/5</a:t>
             </a:fld>
             <a:endParaRPr kumimoji="1" lang="ja-JP" altLang="en-US"/>
           </a:p>
@@ -868,7 +868,7 @@
           <a:p>
             <a:fld id="{0E085FA6-3BB9-47BA-8D81-299A75D1B58A}" type="datetimeFigureOut">
               <a:rPr kumimoji="1" lang="ja-JP" altLang="en-US" smtClean="0"/>
-              <a:t>2025/10/16</a:t>
+              <a:t>2026/3/5</a:t>
             </a:fld>
             <a:endParaRPr kumimoji="1" lang="ja-JP" altLang="en-US"/>
           </a:p>
@@ -1113,7 +1113,7 @@
           <a:p>
             <a:fld id="{0E085FA6-3BB9-47BA-8D81-299A75D1B58A}" type="datetimeFigureOut">
               <a:rPr kumimoji="1" lang="ja-JP" altLang="en-US" smtClean="0"/>
-              <a:t>2025/10/16</a:t>
+              <a:t>2026/3/5</a:t>
             </a:fld>
             <a:endParaRPr kumimoji="1" lang="ja-JP" altLang="en-US"/>
           </a:p>
@@ -1406,7 +1406,7 @@
           <a:p>
             <a:fld id="{0E085FA6-3BB9-47BA-8D81-299A75D1B58A}" type="datetimeFigureOut">
               <a:rPr kumimoji="1" lang="ja-JP" altLang="en-US" smtClean="0"/>
-              <a:t>2025/10/16</a:t>
+              <a:t>2026/3/5</a:t>
             </a:fld>
             <a:endParaRPr kumimoji="1" lang="ja-JP" altLang="en-US"/>
           </a:p>
@@ -1834,7 +1834,7 @@
           <a:p>
             <a:fld id="{0E085FA6-3BB9-47BA-8D81-299A75D1B58A}" type="datetimeFigureOut">
               <a:rPr kumimoji="1" lang="ja-JP" altLang="en-US" smtClean="0"/>
-              <a:t>2025/10/16</a:t>
+              <a:t>2026/3/5</a:t>
             </a:fld>
             <a:endParaRPr kumimoji="1" lang="ja-JP" altLang="en-US"/>
           </a:p>
@@ -1951,7 +1951,7 @@
           <a:p>
             <a:fld id="{0E085FA6-3BB9-47BA-8D81-299A75D1B58A}" type="datetimeFigureOut">
               <a:rPr kumimoji="1" lang="ja-JP" altLang="en-US" smtClean="0"/>
-              <a:t>2025/10/16</a:t>
+              <a:t>2026/3/5</a:t>
             </a:fld>
             <a:endParaRPr kumimoji="1" lang="ja-JP" altLang="en-US"/>
           </a:p>
@@ -2046,7 +2046,7 @@
           <a:p>
             <a:fld id="{0E085FA6-3BB9-47BA-8D81-299A75D1B58A}" type="datetimeFigureOut">
               <a:rPr kumimoji="1" lang="ja-JP" altLang="en-US" smtClean="0"/>
-              <a:t>2025/10/16</a:t>
+              <a:t>2026/3/5</a:t>
             </a:fld>
             <a:endParaRPr kumimoji="1" lang="ja-JP" altLang="en-US"/>
           </a:p>
@@ -2353,7 +2353,7 @@
           <a:p>
             <a:fld id="{0E085FA6-3BB9-47BA-8D81-299A75D1B58A}" type="datetimeFigureOut">
               <a:rPr kumimoji="1" lang="ja-JP" altLang="en-US" smtClean="0"/>
-              <a:t>2025/10/16</a:t>
+              <a:t>2026/3/5</a:t>
             </a:fld>
             <a:endParaRPr kumimoji="1" lang="ja-JP" altLang="en-US"/>
           </a:p>
@@ -2605,7 +2605,7 @@
           <a:p>
             <a:fld id="{0E085FA6-3BB9-47BA-8D81-299A75D1B58A}" type="datetimeFigureOut">
               <a:rPr kumimoji="1" lang="ja-JP" altLang="en-US" smtClean="0"/>
-              <a:t>2025/10/16</a:t>
+              <a:t>2026/3/5</a:t>
             </a:fld>
             <a:endParaRPr kumimoji="1" lang="ja-JP" altLang="en-US"/>
           </a:p>
@@ -2848,7 +2848,7 @@
           <a:p>
             <a:fld id="{0E085FA6-3BB9-47BA-8D81-299A75D1B58A}" type="datetimeFigureOut">
               <a:rPr kumimoji="1" lang="ja-JP" altLang="en-US" smtClean="0"/>
-              <a:t>2025/10/16</a:t>
+              <a:t>2026/3/5</a:t>
             </a:fld>
             <a:endParaRPr kumimoji="1" lang="ja-JP" altLang="en-US"/>
           </a:p>
@@ -3261,15 +3261,13 @@
         </p:nvSpPr>
         <p:spPr>
           <a:xfrm>
-            <a:off x="327381" y="542400"/>
+            <a:off x="327381" y="559442"/>
             <a:ext cx="2152505" cy="2152505"/>
           </a:xfrm>
           <a:prstGeom prst="rect">
             <a:avLst/>
           </a:prstGeom>
-          <a:solidFill>
-            <a:schemeClr val="bg1"/>
-          </a:solidFill>
+          <a:noFill/>
           <a:ln>
             <a:solidFill>
               <a:schemeClr val="tx1"/>
@@ -3309,15 +3307,13 @@
         </p:nvSpPr>
         <p:spPr>
           <a:xfrm>
-            <a:off x="2497015" y="542400"/>
+            <a:off x="2497015" y="559442"/>
             <a:ext cx="2152505" cy="2152505"/>
           </a:xfrm>
           <a:prstGeom prst="rect">
             <a:avLst/>
           </a:prstGeom>
-          <a:solidFill>
-            <a:schemeClr val="bg1"/>
-          </a:solidFill>
+          <a:noFill/>
           <a:ln>
             <a:solidFill>
               <a:schemeClr val="tx1"/>
@@ -3363,9 +3359,7 @@
           <a:prstGeom prst="rect">
             <a:avLst/>
           </a:prstGeom>
-          <a:solidFill>
-            <a:schemeClr val="bg1"/>
-          </a:solidFill>
+          <a:noFill/>
           <a:ln>
             <a:solidFill>
               <a:schemeClr val="tx1"/>
@@ -3411,9 +3405,7 @@
           <a:prstGeom prst="rect">
             <a:avLst/>
           </a:prstGeom>
-          <a:solidFill>
-            <a:schemeClr val="bg1"/>
-          </a:solidFill>
+          <a:noFill/>
           <a:ln>
             <a:solidFill>
               <a:schemeClr val="tx1"/>
@@ -3459,9 +3451,7 @@
           <a:prstGeom prst="rect">
             <a:avLst/>
           </a:prstGeom>
-          <a:solidFill>
-            <a:schemeClr val="bg1"/>
-          </a:solidFill>
+          <a:noFill/>
           <a:ln>
             <a:solidFill>
               <a:schemeClr val="tx1"/>
@@ -3507,9 +3497,7 @@
           <a:prstGeom prst="rect">
             <a:avLst/>
           </a:prstGeom>
-          <a:solidFill>
-            <a:schemeClr val="bg1"/>
-          </a:solidFill>
+          <a:noFill/>
           <a:ln>
             <a:solidFill>
               <a:schemeClr val="tx1"/>
@@ -3555,9 +3543,7 @@
           <a:prstGeom prst="rect">
             <a:avLst/>
           </a:prstGeom>
-          <a:solidFill>
-            <a:schemeClr val="bg1"/>
-          </a:solidFill>
+          <a:noFill/>
           <a:ln>
             <a:solidFill>
               <a:schemeClr val="tx1"/>
@@ -3603,9 +3589,7 @@
           <a:prstGeom prst="rect">
             <a:avLst/>
           </a:prstGeom>
-          <a:solidFill>
-            <a:schemeClr val="bg1"/>
-          </a:solidFill>
+          <a:noFill/>
           <a:ln>
             <a:solidFill>
               <a:schemeClr val="tx1"/>
@@ -3651,9 +3635,7 @@
           <a:prstGeom prst="rect">
             <a:avLst/>
           </a:prstGeom>
-          <a:solidFill>
-            <a:schemeClr val="bg1"/>
-          </a:solidFill>
+          <a:noFill/>
           <a:ln>
             <a:solidFill>
               <a:schemeClr val="tx1"/>
@@ -3699,9 +3681,7 @@
           <a:prstGeom prst="rect">
             <a:avLst/>
           </a:prstGeom>
-          <a:solidFill>
-            <a:schemeClr val="bg1"/>
-          </a:solidFill>
+          <a:noFill/>
           <a:ln>
             <a:solidFill>
               <a:schemeClr val="tx1"/>
@@ -3747,9 +3727,7 @@
           <a:prstGeom prst="rect">
             <a:avLst/>
           </a:prstGeom>
-          <a:solidFill>
-            <a:schemeClr val="bg1"/>
-          </a:solidFill>
+          <a:noFill/>
           <a:ln>
             <a:solidFill>
               <a:schemeClr val="tx1"/>
@@ -3795,9 +3773,7 @@
           <a:prstGeom prst="rect">
             <a:avLst/>
           </a:prstGeom>
-          <a:solidFill>
-            <a:schemeClr val="bg1"/>
-          </a:solidFill>
+          <a:noFill/>
           <a:ln>
             <a:solidFill>
               <a:schemeClr val="tx1"/>
@@ -4131,15 +4107,13 @@
         </p:nvSpPr>
         <p:spPr>
           <a:xfrm>
-            <a:off x="5196168" y="1122960"/>
+            <a:off x="5196168" y="1140002"/>
             <a:ext cx="1069260" cy="1069260"/>
           </a:xfrm>
           <a:prstGeom prst="rect">
             <a:avLst/>
           </a:prstGeom>
-          <a:solidFill>
-            <a:schemeClr val="bg1"/>
-          </a:solidFill>
+          <a:noFill/>
           <a:ln>
             <a:solidFill>
               <a:schemeClr val="tx1"/>
@@ -4185,15 +4159,13 @@
         </p:nvSpPr>
         <p:spPr>
           <a:xfrm>
-            <a:off x="6645353" y="1122960"/>
+            <a:off x="6645353" y="1140002"/>
             <a:ext cx="1069260" cy="1069260"/>
           </a:xfrm>
           <a:prstGeom prst="rect">
             <a:avLst/>
           </a:prstGeom>
-          <a:solidFill>
-            <a:schemeClr val="bg1"/>
-          </a:solidFill>
+          <a:noFill/>
           <a:ln>
             <a:solidFill>
               <a:schemeClr val="tx1"/>
@@ -4245,9 +4217,7 @@
           <a:prstGeom prst="rect">
             <a:avLst/>
           </a:prstGeom>
-          <a:solidFill>
-            <a:schemeClr val="bg1"/>
-          </a:solidFill>
+          <a:noFill/>
           <a:ln>
             <a:solidFill>
               <a:schemeClr val="tx1"/>
@@ -4299,9 +4269,7 @@
           <a:prstGeom prst="rect">
             <a:avLst/>
           </a:prstGeom>
-          <a:solidFill>
-            <a:schemeClr val="bg1"/>
-          </a:solidFill>
+          <a:noFill/>
           <a:ln>
             <a:solidFill>
               <a:schemeClr val="tx1"/>
@@ -4353,9 +4321,7 @@
           <a:prstGeom prst="rect">
             <a:avLst/>
           </a:prstGeom>
-          <a:solidFill>
-            <a:schemeClr val="bg1"/>
-          </a:solidFill>
+          <a:noFill/>
           <a:ln>
             <a:solidFill>
               <a:schemeClr val="tx1"/>
@@ -15774,9 +15740,7 @@
           <a:prstGeom prst="rect">
             <a:avLst/>
           </a:prstGeom>
-          <a:solidFill>
-            <a:schemeClr val="bg1"/>
-          </a:solidFill>
+          <a:noFill/>
           <a:ln>
             <a:solidFill>
               <a:schemeClr val="tx1"/>
@@ -15822,9 +15786,7 @@
           <a:prstGeom prst="rect">
             <a:avLst/>
           </a:prstGeom>
-          <a:solidFill>
-            <a:schemeClr val="bg1"/>
-          </a:solidFill>
+          <a:noFill/>
           <a:ln>
             <a:solidFill>
               <a:schemeClr val="tx1"/>
@@ -15870,9 +15832,7 @@
           <a:prstGeom prst="rect">
             <a:avLst/>
           </a:prstGeom>
-          <a:solidFill>
-            <a:schemeClr val="bg1"/>
-          </a:solidFill>
+          <a:noFill/>
           <a:ln>
             <a:solidFill>
               <a:schemeClr val="tx1"/>
@@ -15918,9 +15878,7 @@
           <a:prstGeom prst="rect">
             <a:avLst/>
           </a:prstGeom>
-          <a:solidFill>
-            <a:schemeClr val="bg1"/>
-          </a:solidFill>
+          <a:noFill/>
           <a:ln>
             <a:solidFill>
               <a:schemeClr val="tx1"/>
@@ -15966,9 +15924,7 @@
           <a:prstGeom prst="rect">
             <a:avLst/>
           </a:prstGeom>
-          <a:solidFill>
-            <a:schemeClr val="bg1"/>
-          </a:solidFill>
+          <a:noFill/>
           <a:ln>
             <a:solidFill>
               <a:schemeClr val="tx1"/>
@@ -16014,9 +15970,7 @@
           <a:prstGeom prst="rect">
             <a:avLst/>
           </a:prstGeom>
-          <a:solidFill>
-            <a:schemeClr val="bg1"/>
-          </a:solidFill>
+          <a:noFill/>
           <a:ln>
             <a:solidFill>
               <a:schemeClr val="tx1"/>
@@ -16062,9 +16016,7 @@
           <a:prstGeom prst="rect">
             <a:avLst/>
           </a:prstGeom>
-          <a:solidFill>
-            <a:schemeClr val="bg1"/>
-          </a:solidFill>
+          <a:noFill/>
           <a:ln>
             <a:solidFill>
               <a:schemeClr val="tx1"/>
@@ -16110,9 +16062,7 @@
           <a:prstGeom prst="rect">
             <a:avLst/>
           </a:prstGeom>
-          <a:solidFill>
-            <a:schemeClr val="bg1"/>
-          </a:solidFill>
+          <a:noFill/>
           <a:ln>
             <a:solidFill>
               <a:schemeClr val="tx1"/>
@@ -16158,9 +16108,7 @@
           <a:prstGeom prst="rect">
             <a:avLst/>
           </a:prstGeom>
-          <a:solidFill>
-            <a:schemeClr val="bg1"/>
-          </a:solidFill>
+          <a:noFill/>
           <a:ln>
             <a:solidFill>
               <a:schemeClr val="tx1"/>
@@ -16206,9 +16154,7 @@
           <a:prstGeom prst="rect">
             <a:avLst/>
           </a:prstGeom>
-          <a:solidFill>
-            <a:schemeClr val="bg1"/>
-          </a:solidFill>
+          <a:noFill/>
           <a:ln>
             <a:solidFill>
               <a:schemeClr val="tx1"/>
@@ -16254,9 +16200,7 @@
           <a:prstGeom prst="rect">
             <a:avLst/>
           </a:prstGeom>
-          <a:solidFill>
-            <a:schemeClr val="bg1"/>
-          </a:solidFill>
+          <a:noFill/>
           <a:ln>
             <a:solidFill>
               <a:schemeClr val="tx1"/>
@@ -16302,9 +16246,7 @@
           <a:prstGeom prst="rect">
             <a:avLst/>
           </a:prstGeom>
-          <a:solidFill>
-            <a:schemeClr val="bg1"/>
-          </a:solidFill>
+          <a:noFill/>
           <a:ln>
             <a:solidFill>
               <a:schemeClr val="tx1"/>
@@ -16332,7 +16274,7 @@
           <a:lstStyle/>
           <a:p>
             <a:pPr algn="ctr"/>
-            <a:endParaRPr kumimoji="1" lang="ja-JP" altLang="en-US"/>
+            <a:endParaRPr kumimoji="1" lang="ja-JP" altLang="en-US" dirty="0"/>
           </a:p>
         </p:txBody>
       </p:sp>
@@ -16638,9 +16580,7 @@
           <a:prstGeom prst="rect">
             <a:avLst/>
           </a:prstGeom>
-          <a:solidFill>
-            <a:schemeClr val="bg1"/>
-          </a:solidFill>
+          <a:noFill/>
           <a:ln>
             <a:solidFill>
               <a:schemeClr val="tx1"/>
@@ -16716,9 +16656,7 @@
           <a:prstGeom prst="rect">
             <a:avLst/>
           </a:prstGeom>
-          <a:solidFill>
-            <a:schemeClr val="bg1"/>
-          </a:solidFill>
+          <a:noFill/>
           <a:ln>
             <a:solidFill>
               <a:schemeClr val="tx1"/>
@@ -16770,9 +16708,7 @@
           <a:prstGeom prst="rect">
             <a:avLst/>
           </a:prstGeom>
-          <a:solidFill>
-            <a:schemeClr val="bg1"/>
-          </a:solidFill>
+          <a:noFill/>
           <a:ln>
             <a:solidFill>
               <a:schemeClr val="tx1"/>
@@ -16824,9 +16760,7 @@
           <a:prstGeom prst="rect">
             <a:avLst/>
           </a:prstGeom>
-          <a:solidFill>
-            <a:schemeClr val="bg1"/>
-          </a:solidFill>
+          <a:noFill/>
           <a:ln>
             <a:solidFill>
               <a:schemeClr val="tx1"/>
@@ -16878,9 +16812,7 @@
           <a:prstGeom prst="rect">
             <a:avLst/>
           </a:prstGeom>
-          <a:solidFill>
-            <a:schemeClr val="bg1"/>
-          </a:solidFill>
+          <a:noFill/>
           <a:ln>
             <a:solidFill>
               <a:schemeClr val="tx1"/>
@@ -17234,9 +17166,7 @@
           <a:prstGeom prst="rect">
             <a:avLst/>
           </a:prstGeom>
-          <a:solidFill>
-            <a:schemeClr val="bg1"/>
-          </a:solidFill>
+          <a:noFill/>
           <a:ln>
             <a:solidFill>
               <a:schemeClr val="tx1"/>
@@ -17282,9 +17212,7 @@
           <a:prstGeom prst="rect">
             <a:avLst/>
           </a:prstGeom>
-          <a:solidFill>
-            <a:schemeClr val="bg1"/>
-          </a:solidFill>
+          <a:noFill/>
           <a:ln>
             <a:solidFill>
               <a:schemeClr val="tx1"/>
@@ -17330,9 +17258,7 @@
           <a:prstGeom prst="rect">
             <a:avLst/>
           </a:prstGeom>
-          <a:solidFill>
-            <a:schemeClr val="bg1"/>
-          </a:solidFill>
+          <a:noFill/>
           <a:ln>
             <a:solidFill>
               <a:schemeClr val="tx1"/>
@@ -17378,9 +17304,7 @@
           <a:prstGeom prst="rect">
             <a:avLst/>
           </a:prstGeom>
-          <a:solidFill>
-            <a:schemeClr val="bg1"/>
-          </a:solidFill>
+          <a:noFill/>
           <a:ln>
             <a:solidFill>
               <a:schemeClr val="tx1"/>
@@ -17426,9 +17350,7 @@
           <a:prstGeom prst="rect">
             <a:avLst/>
           </a:prstGeom>
-          <a:solidFill>
-            <a:schemeClr val="bg1"/>
-          </a:solidFill>
+          <a:noFill/>
           <a:ln>
             <a:solidFill>
               <a:schemeClr val="tx1"/>
@@ -17474,9 +17396,7 @@
           <a:prstGeom prst="rect">
             <a:avLst/>
           </a:prstGeom>
-          <a:solidFill>
-            <a:schemeClr val="bg1"/>
-          </a:solidFill>
+          <a:noFill/>
           <a:ln>
             <a:solidFill>
               <a:schemeClr val="tx1"/>
@@ -17522,9 +17442,7 @@
           <a:prstGeom prst="rect">
             <a:avLst/>
           </a:prstGeom>
-          <a:solidFill>
-            <a:schemeClr val="bg1"/>
-          </a:solidFill>
+          <a:noFill/>
           <a:ln>
             <a:solidFill>
               <a:schemeClr val="tx1"/>
@@ -17570,9 +17488,7 @@
           <a:prstGeom prst="rect">
             <a:avLst/>
           </a:prstGeom>
-          <a:solidFill>
-            <a:schemeClr val="bg1"/>
-          </a:solidFill>
+          <a:noFill/>
           <a:ln>
             <a:solidFill>
               <a:schemeClr val="tx1"/>
@@ -17618,9 +17534,7 @@
           <a:prstGeom prst="rect">
             <a:avLst/>
           </a:prstGeom>
-          <a:solidFill>
-            <a:schemeClr val="bg1"/>
-          </a:solidFill>
+          <a:noFill/>
           <a:ln>
             <a:solidFill>
               <a:schemeClr val="tx1"/>
@@ -17666,9 +17580,7 @@
           <a:prstGeom prst="rect">
             <a:avLst/>
           </a:prstGeom>
-          <a:solidFill>
-            <a:schemeClr val="bg1"/>
-          </a:solidFill>
+          <a:noFill/>
           <a:ln>
             <a:solidFill>
               <a:schemeClr val="tx1"/>
@@ -17714,9 +17626,7 @@
           <a:prstGeom prst="rect">
             <a:avLst/>
           </a:prstGeom>
-          <a:solidFill>
-            <a:schemeClr val="bg1"/>
-          </a:solidFill>
+          <a:noFill/>
           <a:ln>
             <a:solidFill>
               <a:schemeClr val="tx1"/>
@@ -17762,9 +17672,7 @@
           <a:prstGeom prst="rect">
             <a:avLst/>
           </a:prstGeom>
-          <a:solidFill>
-            <a:schemeClr val="bg1"/>
-          </a:solidFill>
+          <a:noFill/>
           <a:ln>
             <a:solidFill>
               <a:schemeClr val="tx1"/>
@@ -17810,9 +17718,7 @@
           <a:prstGeom prst="rect">
             <a:avLst/>
           </a:prstGeom>
-          <a:solidFill>
-            <a:schemeClr val="bg1"/>
-          </a:solidFill>
+          <a:noFill/>
           <a:ln>
             <a:solidFill>
               <a:schemeClr val="tx1"/>
@@ -18032,9 +17938,7 @@
           <a:prstGeom prst="rect">
             <a:avLst/>
           </a:prstGeom>
-          <a:solidFill>
-            <a:srgbClr val="FFFFFF"/>
-          </a:solidFill>
+          <a:noFill/>
           <a:ln>
             <a:solidFill>
               <a:schemeClr val="tx1"/>
@@ -18086,9 +17990,7 @@
           <a:prstGeom prst="rect">
             <a:avLst/>
           </a:prstGeom>
-          <a:solidFill>
-            <a:schemeClr val="bg1"/>
-          </a:solidFill>
+          <a:noFill/>
           <a:ln>
             <a:solidFill>
               <a:schemeClr val="tx1"/>
@@ -18140,9 +18042,7 @@
           <a:prstGeom prst="rect">
             <a:avLst/>
           </a:prstGeom>
-          <a:solidFill>
-            <a:schemeClr val="bg1"/>
-          </a:solidFill>
+          <a:noFill/>
           <a:ln>
             <a:solidFill>
               <a:schemeClr val="tx1"/>
@@ -18194,9 +18094,7 @@
           <a:prstGeom prst="rect">
             <a:avLst/>
           </a:prstGeom>
-          <a:solidFill>
-            <a:schemeClr val="bg1"/>
-          </a:solidFill>
+          <a:noFill/>
           <a:ln>
             <a:solidFill>
               <a:schemeClr val="tx1"/>
@@ -18632,9 +18530,7 @@
           <a:prstGeom prst="rect">
             <a:avLst/>
           </a:prstGeom>
-          <a:solidFill>
-            <a:schemeClr val="bg1"/>
-          </a:solidFill>
+          <a:noFill/>
           <a:ln>
             <a:solidFill>
               <a:schemeClr val="tx1"/>
@@ -18686,9 +18582,7 @@
           <a:prstGeom prst="rect">
             <a:avLst/>
           </a:prstGeom>
-          <a:solidFill>
-            <a:schemeClr val="bg1"/>
-          </a:solidFill>
+          <a:noFill/>
           <a:ln>
             <a:solidFill>
               <a:schemeClr val="tx1"/>
@@ -18740,9 +18634,7 @@
           <a:prstGeom prst="rect">
             <a:avLst/>
           </a:prstGeom>
-          <a:solidFill>
-            <a:schemeClr val="bg1"/>
-          </a:solidFill>
+          <a:noFill/>
           <a:ln>
             <a:solidFill>
               <a:schemeClr val="tx1"/>
@@ -18794,9 +18686,7 @@
           <a:prstGeom prst="rect">
             <a:avLst/>
           </a:prstGeom>
-          <a:solidFill>
-            <a:schemeClr val="bg1"/>
-          </a:solidFill>
+          <a:noFill/>
           <a:ln>
             <a:solidFill>
               <a:schemeClr val="tx1"/>
@@ -18848,9 +18738,7 @@
           <a:prstGeom prst="rect">
             <a:avLst/>
           </a:prstGeom>
-          <a:solidFill>
-            <a:schemeClr val="bg1"/>
-          </a:solidFill>
+          <a:noFill/>
           <a:ln>
             <a:solidFill>
               <a:schemeClr val="tx1"/>
@@ -18902,9 +18790,7 @@
           <a:prstGeom prst="rect">
             <a:avLst/>
           </a:prstGeom>
-          <a:solidFill>
-            <a:schemeClr val="bg1"/>
-          </a:solidFill>
+          <a:noFill/>
           <a:ln>
             <a:solidFill>
               <a:schemeClr val="tx1"/>
@@ -18956,9 +18842,7 @@
           <a:prstGeom prst="rect">
             <a:avLst/>
           </a:prstGeom>
-          <a:solidFill>
-            <a:schemeClr val="bg1"/>
-          </a:solidFill>
+          <a:noFill/>
           <a:ln>
             <a:solidFill>
               <a:schemeClr val="tx1"/>
@@ -19010,9 +18894,7 @@
           <a:prstGeom prst="rect">
             <a:avLst/>
           </a:prstGeom>
-          <a:solidFill>
-            <a:schemeClr val="bg1"/>
-          </a:solidFill>
+          <a:noFill/>
           <a:ln>
             <a:solidFill>
               <a:schemeClr val="tx1"/>
@@ -19064,9 +18946,7 @@
           <a:prstGeom prst="rect">
             <a:avLst/>
           </a:prstGeom>
-          <a:solidFill>
-            <a:schemeClr val="bg1"/>
-          </a:solidFill>
+          <a:noFill/>
           <a:ln>
             <a:solidFill>
               <a:schemeClr val="tx1"/>
@@ -19118,9 +18998,7 @@
           <a:prstGeom prst="rect">
             <a:avLst/>
           </a:prstGeom>
-          <a:solidFill>
-            <a:schemeClr val="bg1"/>
-          </a:solidFill>
+          <a:noFill/>
           <a:ln>
             <a:solidFill>
               <a:schemeClr val="tx1"/>
@@ -19172,9 +19050,7 @@
           <a:prstGeom prst="rect">
             <a:avLst/>
           </a:prstGeom>
-          <a:solidFill>
-            <a:schemeClr val="bg1"/>
-          </a:solidFill>
+          <a:noFill/>
           <a:ln>
             <a:solidFill>
               <a:schemeClr val="tx1"/>
@@ -19226,9 +19102,7 @@
           <a:prstGeom prst="rect">
             <a:avLst/>
           </a:prstGeom>
-          <a:solidFill>
-            <a:schemeClr val="bg1"/>
-          </a:solidFill>
+          <a:noFill/>
           <a:ln>
             <a:solidFill>
               <a:schemeClr val="tx1"/>
@@ -19280,9 +19154,7 @@
           <a:prstGeom prst="rect">
             <a:avLst/>
           </a:prstGeom>
-          <a:solidFill>
-            <a:schemeClr val="bg1"/>
-          </a:solidFill>
+          <a:noFill/>
           <a:ln>
             <a:solidFill>
               <a:schemeClr val="tx1"/>
@@ -19334,9 +19206,7 @@
           <a:prstGeom prst="rect">
             <a:avLst/>
           </a:prstGeom>
-          <a:solidFill>
-            <a:schemeClr val="bg1"/>
-          </a:solidFill>
+          <a:noFill/>
           <a:ln>
             <a:solidFill>
               <a:schemeClr val="tx1"/>
@@ -19388,9 +19258,7 @@
           <a:prstGeom prst="rect">
             <a:avLst/>
           </a:prstGeom>
-          <a:solidFill>
-            <a:schemeClr val="bg1"/>
-          </a:solidFill>
+          <a:noFill/>
           <a:ln>
             <a:solidFill>
               <a:schemeClr val="tx1"/>
@@ -19442,9 +19310,7 @@
           <a:prstGeom prst="rect">
             <a:avLst/>
           </a:prstGeom>
-          <a:solidFill>
-            <a:schemeClr val="bg1"/>
-          </a:solidFill>
+          <a:noFill/>
           <a:ln>
             <a:solidFill>
               <a:schemeClr val="tx1"/>
@@ -19496,9 +19362,7 @@
           <a:prstGeom prst="rect">
             <a:avLst/>
           </a:prstGeom>
-          <a:solidFill>
-            <a:schemeClr val="bg1"/>
-          </a:solidFill>
+          <a:noFill/>
           <a:ln>
             <a:solidFill>
               <a:schemeClr val="tx1"/>
@@ -19676,9 +19540,7 @@
           <a:prstGeom prst="rect">
             <a:avLst/>
           </a:prstGeom>
-          <a:solidFill>
-            <a:schemeClr val="bg1"/>
-          </a:solidFill>
+          <a:noFill/>
           <a:ln>
             <a:solidFill>
               <a:schemeClr val="tx1"/>
@@ -19730,9 +19592,7 @@
           <a:prstGeom prst="rect">
             <a:avLst/>
           </a:prstGeom>
-          <a:solidFill>
-            <a:schemeClr val="bg1"/>
-          </a:solidFill>
+          <a:noFill/>
           <a:ln>
             <a:solidFill>
               <a:schemeClr val="tx1"/>
@@ -19784,9 +19644,7 @@
           <a:prstGeom prst="rect">
             <a:avLst/>
           </a:prstGeom>
-          <a:solidFill>
-            <a:schemeClr val="bg1"/>
-          </a:solidFill>
+          <a:noFill/>
           <a:ln>
             <a:solidFill>
               <a:schemeClr val="tx1"/>
@@ -19838,9 +19696,7 @@
           <a:prstGeom prst="rect">
             <a:avLst/>
           </a:prstGeom>
-          <a:solidFill>
-            <a:schemeClr val="bg1"/>
-          </a:solidFill>
+          <a:noFill/>
           <a:ln>
             <a:solidFill>
               <a:schemeClr val="tx1"/>
@@ -19892,9 +19748,7 @@
           <a:prstGeom prst="rect">
             <a:avLst/>
           </a:prstGeom>
-          <a:solidFill>
-            <a:schemeClr val="bg1"/>
-          </a:solidFill>
+          <a:noFill/>
           <a:ln>
             <a:solidFill>
               <a:schemeClr val="tx1"/>
@@ -19946,9 +19800,7 @@
           <a:prstGeom prst="rect">
             <a:avLst/>
           </a:prstGeom>
-          <a:solidFill>
-            <a:schemeClr val="bg1"/>
-          </a:solidFill>
+          <a:noFill/>
           <a:ln>
             <a:solidFill>
               <a:schemeClr val="tx1"/>
@@ -20000,9 +19852,7 @@
           <a:prstGeom prst="rect">
             <a:avLst/>
           </a:prstGeom>
-          <a:solidFill>
-            <a:schemeClr val="bg1"/>
-          </a:solidFill>
+          <a:noFill/>
           <a:ln>
             <a:solidFill>
               <a:schemeClr val="tx1"/>
@@ -20054,9 +19904,7 @@
           <a:prstGeom prst="rect">
             <a:avLst/>
           </a:prstGeom>
-          <a:solidFill>
-            <a:schemeClr val="bg1"/>
-          </a:solidFill>
+          <a:noFill/>
           <a:ln>
             <a:solidFill>
               <a:schemeClr val="tx1"/>
@@ -20108,9 +19956,7 @@
           <a:prstGeom prst="rect">
             <a:avLst/>
           </a:prstGeom>
-          <a:solidFill>
-            <a:schemeClr val="bg1"/>
-          </a:solidFill>
+          <a:noFill/>
           <a:ln>
             <a:solidFill>
               <a:schemeClr val="tx1"/>
@@ -20162,9 +20008,7 @@
           <a:prstGeom prst="rect">
             <a:avLst/>
           </a:prstGeom>
-          <a:solidFill>
-            <a:schemeClr val="bg1"/>
-          </a:solidFill>
+          <a:noFill/>
           <a:ln>
             <a:solidFill>
               <a:schemeClr val="tx1"/>
@@ -20216,9 +20060,7 @@
           <a:prstGeom prst="rect">
             <a:avLst/>
           </a:prstGeom>
-          <a:solidFill>
-            <a:schemeClr val="bg1"/>
-          </a:solidFill>
+          <a:noFill/>
           <a:ln>
             <a:solidFill>
               <a:schemeClr val="tx1"/>
@@ -20270,9 +20112,7 @@
           <a:prstGeom prst="rect">
             <a:avLst/>
           </a:prstGeom>
-          <a:solidFill>
-            <a:schemeClr val="bg1"/>
-          </a:solidFill>
+          <a:noFill/>
           <a:ln>
             <a:solidFill>
               <a:schemeClr val="tx1"/>
@@ -20324,9 +20164,7 @@
           <a:prstGeom prst="rect">
             <a:avLst/>
           </a:prstGeom>
-          <a:solidFill>
-            <a:schemeClr val="bg1"/>
-          </a:solidFill>
+          <a:noFill/>
           <a:ln>
             <a:solidFill>
               <a:schemeClr val="tx1"/>
@@ -20378,9 +20216,7 @@
           <a:prstGeom prst="rect">
             <a:avLst/>
           </a:prstGeom>
-          <a:solidFill>
-            <a:schemeClr val="bg1"/>
-          </a:solidFill>
+          <a:noFill/>
           <a:ln>
             <a:solidFill>
               <a:schemeClr val="tx1"/>
@@ -20432,9 +20268,7 @@
           <a:prstGeom prst="rect">
             <a:avLst/>
           </a:prstGeom>
-          <a:solidFill>
-            <a:schemeClr val="bg1"/>
-          </a:solidFill>
+          <a:noFill/>
           <a:ln>
             <a:solidFill>
               <a:schemeClr val="tx1"/>
@@ -20486,9 +20320,7 @@
           <a:prstGeom prst="rect">
             <a:avLst/>
           </a:prstGeom>
-          <a:solidFill>
-            <a:schemeClr val="bg1"/>
-          </a:solidFill>
+          <a:noFill/>
           <a:ln>
             <a:solidFill>
               <a:schemeClr val="tx1"/>
@@ -20540,9 +20372,7 @@
           <a:prstGeom prst="rect">
             <a:avLst/>
           </a:prstGeom>
-          <a:solidFill>
-            <a:schemeClr val="bg1"/>
-          </a:solidFill>
+          <a:noFill/>
           <a:ln>
             <a:solidFill>
               <a:schemeClr val="tx1"/>
@@ -21560,9 +21390,7 @@
           <a:prstGeom prst="rect">
             <a:avLst/>
           </a:prstGeom>
-          <a:solidFill>
-            <a:schemeClr val="bg1"/>
-          </a:solidFill>
+          <a:noFill/>
           <a:ln>
             <a:solidFill>
               <a:schemeClr val="tx1"/>
@@ -21614,9 +21442,7 @@
           <a:prstGeom prst="rect">
             <a:avLst/>
           </a:prstGeom>
-          <a:solidFill>
-            <a:schemeClr val="bg1"/>
-          </a:solidFill>
+          <a:noFill/>
           <a:ln>
             <a:solidFill>
               <a:schemeClr val="tx1"/>
@@ -21668,9 +21494,7 @@
           <a:prstGeom prst="rect">
             <a:avLst/>
           </a:prstGeom>
-          <a:solidFill>
-            <a:schemeClr val="bg1"/>
-          </a:solidFill>
+          <a:noFill/>
           <a:ln>
             <a:solidFill>
               <a:schemeClr val="tx1"/>
@@ -21722,9 +21546,7 @@
           <a:prstGeom prst="rect">
             <a:avLst/>
           </a:prstGeom>
-          <a:solidFill>
-            <a:schemeClr val="bg1"/>
-          </a:solidFill>
+          <a:noFill/>
           <a:ln>
             <a:solidFill>
               <a:schemeClr val="tx1"/>
@@ -21776,9 +21598,7 @@
           <a:prstGeom prst="rect">
             <a:avLst/>
           </a:prstGeom>
-          <a:solidFill>
-            <a:schemeClr val="bg1"/>
-          </a:solidFill>
+          <a:noFill/>
           <a:ln>
             <a:solidFill>
               <a:schemeClr val="tx1"/>
@@ -21830,9 +21650,7 @@
           <a:prstGeom prst="rect">
             <a:avLst/>
           </a:prstGeom>
-          <a:solidFill>
-            <a:schemeClr val="bg1"/>
-          </a:solidFill>
+          <a:noFill/>
           <a:ln>
             <a:solidFill>
               <a:schemeClr val="tx1"/>
@@ -21884,9 +21702,7 @@
           <a:prstGeom prst="rect">
             <a:avLst/>
           </a:prstGeom>
-          <a:solidFill>
-            <a:schemeClr val="bg1"/>
-          </a:solidFill>
+          <a:noFill/>
           <a:ln>
             <a:solidFill>
               <a:schemeClr val="tx1"/>
@@ -21938,9 +21754,7 @@
           <a:prstGeom prst="rect">
             <a:avLst/>
           </a:prstGeom>
-          <a:solidFill>
-            <a:schemeClr val="bg1"/>
-          </a:solidFill>
+          <a:noFill/>
           <a:ln>
             <a:solidFill>
               <a:schemeClr val="tx1"/>
@@ -21992,9 +21806,7 @@
           <a:prstGeom prst="rect">
             <a:avLst/>
           </a:prstGeom>
-          <a:solidFill>
-            <a:schemeClr val="bg1"/>
-          </a:solidFill>
+          <a:noFill/>
           <a:ln>
             <a:solidFill>
               <a:schemeClr val="tx1"/>
@@ -22046,9 +21858,7 @@
           <a:prstGeom prst="rect">
             <a:avLst/>
           </a:prstGeom>
-          <a:solidFill>
-            <a:schemeClr val="bg1"/>
-          </a:solidFill>
+          <a:noFill/>
           <a:ln>
             <a:solidFill>
               <a:schemeClr val="tx1"/>
@@ -22100,9 +21910,7 @@
           <a:prstGeom prst="rect">
             <a:avLst/>
           </a:prstGeom>
-          <a:solidFill>
-            <a:schemeClr val="bg1"/>
-          </a:solidFill>
+          <a:noFill/>
           <a:ln>
             <a:solidFill>
               <a:schemeClr val="tx1"/>
@@ -22154,9 +21962,7 @@
           <a:prstGeom prst="rect">
             <a:avLst/>
           </a:prstGeom>
-          <a:solidFill>
-            <a:schemeClr val="bg1"/>
-          </a:solidFill>
+          <a:noFill/>
           <a:ln>
             <a:solidFill>
               <a:schemeClr val="tx1"/>
@@ -22208,9 +22014,7 @@
           <a:prstGeom prst="rect">
             <a:avLst/>
           </a:prstGeom>
-          <a:solidFill>
-            <a:schemeClr val="bg1"/>
-          </a:solidFill>
+          <a:noFill/>
           <a:ln>
             <a:solidFill>
               <a:schemeClr val="tx1"/>
@@ -22262,9 +22066,7 @@
           <a:prstGeom prst="rect">
             <a:avLst/>
           </a:prstGeom>
-          <a:solidFill>
-            <a:schemeClr val="bg1"/>
-          </a:solidFill>
+          <a:noFill/>
           <a:ln>
             <a:solidFill>
               <a:schemeClr val="tx1"/>
@@ -22316,9 +22118,7 @@
           <a:prstGeom prst="rect">
             <a:avLst/>
           </a:prstGeom>
-          <a:solidFill>
-            <a:schemeClr val="bg1"/>
-          </a:solidFill>
+          <a:noFill/>
           <a:ln>
             <a:solidFill>
               <a:schemeClr val="tx1"/>
@@ -22370,9 +22170,7 @@
           <a:prstGeom prst="rect">
             <a:avLst/>
           </a:prstGeom>
-          <a:solidFill>
-            <a:schemeClr val="bg1"/>
-          </a:solidFill>
+          <a:noFill/>
           <a:ln>
             <a:solidFill>
               <a:schemeClr val="tx1"/>
@@ -22424,9 +22222,7 @@
           <a:prstGeom prst="rect">
             <a:avLst/>
           </a:prstGeom>
-          <a:solidFill>
-            <a:schemeClr val="bg1"/>
-          </a:solidFill>
+          <a:noFill/>
           <a:ln>
             <a:solidFill>
               <a:schemeClr val="tx1"/>
@@ -23024,9 +22820,7 @@
           <a:prstGeom prst="rect">
             <a:avLst/>
           </a:prstGeom>
-          <a:solidFill>
-            <a:schemeClr val="bg1"/>
-          </a:solidFill>
+          <a:noFill/>
           <a:ln>
             <a:solidFill>
               <a:schemeClr val="tx1"/>
@@ -23078,9 +22872,7 @@
           <a:prstGeom prst="rect">
             <a:avLst/>
           </a:prstGeom>
-          <a:solidFill>
-            <a:schemeClr val="bg1"/>
-          </a:solidFill>
+          <a:noFill/>
           <a:ln>
             <a:solidFill>
               <a:schemeClr val="tx1"/>
@@ -23132,9 +22924,7 @@
           <a:prstGeom prst="rect">
             <a:avLst/>
           </a:prstGeom>
-          <a:solidFill>
-            <a:schemeClr val="bg1"/>
-          </a:solidFill>
+          <a:noFill/>
           <a:ln>
             <a:solidFill>
               <a:schemeClr val="tx1"/>
@@ -23186,9 +22976,7 @@
           <a:prstGeom prst="rect">
             <a:avLst/>
           </a:prstGeom>
-          <a:solidFill>
-            <a:schemeClr val="bg1"/>
-          </a:solidFill>
+          <a:noFill/>
           <a:ln>
             <a:solidFill>
               <a:schemeClr val="tx1"/>
@@ -23240,9 +23028,7 @@
           <a:prstGeom prst="rect">
             <a:avLst/>
           </a:prstGeom>
-          <a:solidFill>
-            <a:schemeClr val="bg1"/>
-          </a:solidFill>
+          <a:noFill/>
           <a:ln>
             <a:solidFill>
               <a:schemeClr val="tx1"/>
@@ -23294,9 +23080,7 @@
           <a:prstGeom prst="rect">
             <a:avLst/>
           </a:prstGeom>
-          <a:solidFill>
-            <a:schemeClr val="bg1"/>
-          </a:solidFill>
+          <a:noFill/>
           <a:ln>
             <a:solidFill>
               <a:schemeClr val="tx1"/>
@@ -23348,9 +23132,7 @@
           <a:prstGeom prst="rect">
             <a:avLst/>
           </a:prstGeom>
-          <a:solidFill>
-            <a:schemeClr val="bg1"/>
-          </a:solidFill>
+          <a:noFill/>
           <a:ln>
             <a:solidFill>
               <a:schemeClr val="tx1"/>
@@ -23402,9 +23184,7 @@
           <a:prstGeom prst="rect">
             <a:avLst/>
           </a:prstGeom>
-          <a:solidFill>
-            <a:schemeClr val="bg1"/>
-          </a:solidFill>
+          <a:noFill/>
           <a:ln>
             <a:solidFill>
               <a:schemeClr val="tx1"/>
@@ -23456,9 +23236,7 @@
           <a:prstGeom prst="rect">
             <a:avLst/>
           </a:prstGeom>
-          <a:solidFill>
-            <a:schemeClr val="bg1"/>
-          </a:solidFill>
+          <a:noFill/>
           <a:ln>
             <a:solidFill>
               <a:schemeClr val="tx1"/>
@@ -23510,9 +23288,7 @@
           <a:prstGeom prst="rect">
             <a:avLst/>
           </a:prstGeom>
-          <a:solidFill>
-            <a:schemeClr val="bg1"/>
-          </a:solidFill>
+          <a:noFill/>
           <a:ln>
             <a:solidFill>
               <a:schemeClr val="tx1"/>
@@ -23564,9 +23340,7 @@
           <a:prstGeom prst="rect">
             <a:avLst/>
           </a:prstGeom>
-          <a:solidFill>
-            <a:schemeClr val="bg1"/>
-          </a:solidFill>
+          <a:noFill/>
           <a:ln>
             <a:solidFill>
               <a:schemeClr val="tx1"/>
@@ -23618,9 +23392,7 @@
           <a:prstGeom prst="rect">
             <a:avLst/>
           </a:prstGeom>
-          <a:solidFill>
-            <a:schemeClr val="bg1"/>
-          </a:solidFill>
+          <a:noFill/>
           <a:ln>
             <a:solidFill>
               <a:schemeClr val="tx1"/>
@@ -23672,9 +23444,7 @@
           <a:prstGeom prst="rect">
             <a:avLst/>
           </a:prstGeom>
-          <a:solidFill>
-            <a:schemeClr val="bg1"/>
-          </a:solidFill>
+          <a:noFill/>
           <a:ln>
             <a:solidFill>
               <a:schemeClr val="tx1"/>
@@ -23726,9 +23496,7 @@
           <a:prstGeom prst="rect">
             <a:avLst/>
           </a:prstGeom>
-          <a:solidFill>
-            <a:schemeClr val="bg1"/>
-          </a:solidFill>
+          <a:noFill/>
           <a:ln>
             <a:solidFill>
               <a:schemeClr val="tx1"/>
@@ -23780,9 +23548,7 @@
           <a:prstGeom prst="rect">
             <a:avLst/>
           </a:prstGeom>
-          <a:solidFill>
-            <a:schemeClr val="bg1"/>
-          </a:solidFill>
+          <a:noFill/>
           <a:ln>
             <a:solidFill>
               <a:schemeClr val="tx1"/>
@@ -23834,9 +23600,7 @@
           <a:prstGeom prst="rect">
             <a:avLst/>
           </a:prstGeom>
-          <a:solidFill>
-            <a:schemeClr val="bg1"/>
-          </a:solidFill>
+          <a:noFill/>
           <a:ln>
             <a:solidFill>
               <a:schemeClr val="tx1"/>
@@ -23888,9 +23652,7 @@
           <a:prstGeom prst="rect">
             <a:avLst/>
           </a:prstGeom>
-          <a:solidFill>
-            <a:schemeClr val="bg1"/>
-          </a:solidFill>
+          <a:noFill/>
           <a:ln>
             <a:solidFill>
               <a:schemeClr val="tx1"/>
